--- a/01-Kubernetes/session2/01-02-Self-Managed-Kubernetes.pptx
+++ b/01-Kubernetes/session2/01-02-Self-Managed-Kubernetes.pptx
@@ -2967,7 +2967,7 @@
         <p:spPr>
           <a:xfrm>
             <a:off x="4937760" y="1691640"/>
-            <a:ext cx="3566160" cy="731520"/>
+            <a:ext cx="3566160" cy="1188720"/>
           </a:xfrm>
           <a:prstGeom prst="rect">
             <a:avLst/>
